--- a/DBTUNING/Day03_조인_서브쿼리_집합_정렬/SQL튜닝_Ch10_교안.pptx
+++ b/DBTUNING/Day03_조인_서브쿼리_집합_정렬/SQL튜닝_Ch10_교안.pptx
@@ -2296,7 +2296,7 @@
           <a:lstStyle/>
           <a:p>
             <a:r>
-              <a:t>같은 두 컬럼인데 앞 표와 결과가 정반대로 갈린다는 점을 먼저 대비시킨다. 바뀐 것은 필터 범위 하나뿐이고, 그 변화가 접근 경로를 바꾸고 접근 경로가 정렬 생략 여부를 바꾼 연쇄다. 마지막 주석의 776과 717 비교는 다음 슬라이드로 넘어가는 미끼이므로, 여기서 답을 말해 버리지 말고 질문만 던져 두는 편이 좋다. 앞 표와 이 표를 화면에서 빠르게 오가며 보여 주면 대비 효과가 크다. 바뀐 조건이 필터 범위 하나뿐이라는 사실을 반복해서 확인시킨다.</a:t>
+              <a:t>같은 두 컬럼인데 앞 표와 결과가 정반대로 갈린다는 점을 먼저 대비시킨다. 바뀐 것은 필터 범위 하나뿐이고, 그 변화가 접근 경로를 바꾸고 접근 경로가 정렬 생략 여부를 바꾼 연쇄다. 마지막 주석의 791과 731 비교는 다음 슬라이드로 넘어가는 미끼이므로, 여기서 답을 말해 버리지 말고 질문만 던져 두는 편이 좋다. 앞 표와 이 표를 화면에서 빠르게 오가며 보여 주면 대비 효과가 크다. 바뀐 조건이 필터 범위 하나뿐이라는 사실을 반복해서 확인시킨다.</a:t>
             </a:r>
           </a:p>
         </p:txBody>
@@ -12892,7 +12892,7 @@
                 </a:solidFill>
                 <a:latin typeface="Consolas"/>
               </a:rPr>
-              <a:t>| ORDER BY claim_id (PK 컬럼)   | INDEX RANGE SCAN만 (정렬 생략됨) |     776 |</a:t>
+              <a:t>| ORDER BY claim_id (PK 컬럼)   | INDEX RANGE SCAN만 (정렬 생략됨) |     791 |</a:t>
             </a:r>
           </a:p>
           <a:p>
@@ -12903,7 +12903,7 @@
                 </a:solidFill>
                 <a:latin typeface="Consolas"/>
               </a:rPr>
-              <a:t>| ORDER BY total_amt (비인덱스) | SORT ORDER BY + INDEX RANGE SCAN |     717 |</a:t>
+              <a:t>| ORDER BY total_amt (비인덱스) | SORT ORDER BY + INDEX RANGE SCAN |     731 |</a:t>
             </a:r>
           </a:p>
           <a:p>
@@ -12969,7 +12969,7 @@
                 </a:solidFill>
                 <a:latin typeface="Consolas"/>
               </a:rPr>
-              <a:t>-- 정렬을 생략한 쪽(776)이 정렬한 쪽(717)보다 Buffers 가 크다는 점에 주목</a:t>
+              <a:t>-- 정렬을 생략한 쪽(791)이 정렬한 쪽(731)보다 Buffers 가 크다는 점에 주목</a:t>
             </a:r>
           </a:p>
         </p:txBody>
@@ -13322,7 +13322,7 @@
                 </a:solidFill>
                 <a:latin typeface="Malgun Gothic"/>
               </a:rPr>
-              <a:t>•  정렬을 생략한 claim_id 쪽 Buffers는 776, 정렬이 발생한 total_amt 쪽은 717이다</a:t>
+              <a:t>•  정렬을 생략한 claim_id 쪽 Buffers는 791, 정렬이 발생한 total_amt 쪽은 731이다</a:t>
             </a:r>
           </a:p>
           <a:p>
@@ -15504,7 +15504,7 @@
                 </a:solidFill>
                 <a:latin typeface="Consolas"/>
               </a:rPr>
-              <a:t>| 좁은 범위 ORDER BY, 인덱스 컬럼 (claim_id)    |     776 | SORT 생략됨                      |</a:t>
+              <a:t>| 좁은 범위 ORDER BY, 인덱스 컬럼 (claim_id)    |     791 | SORT 생략됨                      |</a:t>
             </a:r>
           </a:p>
           <a:p>
@@ -15515,7 +15515,7 @@
                 </a:solidFill>
                 <a:latin typeface="Consolas"/>
               </a:rPr>
-              <a:t>| 좁은 범위 ORDER BY, 비인덱스 컬럼 (total_amt) |     717 | SORT ORDER BY 발생               |</a:t>
+              <a:t>| 좁은 범위 ORDER BY, 비인덱스 컬럼 (total_amt) |     731 | SORT ORDER BY 발생               |</a:t>
             </a:r>
           </a:p>
           <a:p>
@@ -15785,7 +15785,7 @@
                 </a:solidFill>
                 <a:latin typeface="Malgun Gothic"/>
               </a:rPr>
-              <a:t>    –  좁은 범위 사례의 Buffers 776 대 717이 반례다</a:t>
+              <a:t>    –  좁은 범위 사례의 Buffers 791 대 731이 반례다</a:t>
             </a:r>
           </a:p>
           <a:p>
